--- a/DAEN489S26/week12_slides.pptx
+++ b/DAEN489S26/week12_slides.pptx
@@ -5,7 +5,7 @@
     <p:sldMasterId id="2147483660" r:id="rId1"/>
   </p:sldMasterIdLst>
   <p:notesMasterIdLst>
-    <p:notesMasterId r:id="rId31"/>
+    <p:notesMasterId r:id="rId32"/>
   </p:notesMasterIdLst>
   <p:sldIdLst>
     <p:sldId id="256" r:id="rId2"/>
@@ -35,8 +35,9 @@
     <p:sldId id="369" r:id="rId26"/>
     <p:sldId id="367" r:id="rId27"/>
     <p:sldId id="357" r:id="rId28"/>
-    <p:sldId id="343" r:id="rId29"/>
-    <p:sldId id="305" r:id="rId30"/>
+    <p:sldId id="370" r:id="rId29"/>
+    <p:sldId id="343" r:id="rId30"/>
+    <p:sldId id="305" r:id="rId31"/>
   </p:sldIdLst>
   <p:sldSz cx="9144000" cy="6858000" type="screen4x3"/>
   <p:notesSz cx="6858000" cy="9144000"/>
@@ -179,6 +180,7 @@
         <p14:section name="Interpolation" id="{8107A08D-8E25-5A4B-B6E5-4FDF6CDDA291}">
           <p14:sldIdLst>
             <p14:sldId id="357"/>
+            <p14:sldId id="370"/>
           </p14:sldIdLst>
         </p14:section>
         <p14:section name="References" id="{80CE1547-8FED-EB40-BEB2-D4CEAADA67FE}">
@@ -278,7 +280,7 @@
           <a:p>
             <a:fld id="{704FB6DC-B598-8B49-8FDB-37BE75E655AD}" type="datetimeFigureOut">
               <a:rPr lang="en-US" smtClean="0"/>
-              <a:t>4/8/26</a:t>
+              <a:t>4/9/26</a:t>
             </a:fld>
             <a:endParaRPr lang="en-US"/>
           </a:p>
@@ -676,7 +678,7 @@
           <a:p>
             <a:fld id="{558EA6D9-2D7F-9442-BED1-4D7FFC9A34F4}" type="datetime1">
               <a:rPr lang="en-US" smtClean="0"/>
-              <a:t>4/8/26</a:t>
+              <a:t>4/9/26</a:t>
             </a:fld>
             <a:endParaRPr lang="en-US"/>
           </a:p>
@@ -846,7 +848,7 @@
           <a:p>
             <a:fld id="{2EAE58ED-569E-7141-BEA4-8F66F85D6EA8}" type="datetime1">
               <a:rPr lang="en-US" smtClean="0"/>
-              <a:t>4/8/26</a:t>
+              <a:t>4/9/26</a:t>
             </a:fld>
             <a:endParaRPr lang="en-US"/>
           </a:p>
@@ -1092,7 +1094,7 @@
           <a:p>
             <a:fld id="{A832CD10-D7BB-1A41-A802-BCEB6EE7274C}" type="datetime1">
               <a:rPr lang="en-US" smtClean="0"/>
-              <a:t>4/8/26</a:t>
+              <a:t>4/9/26</a:t>
             </a:fld>
             <a:endParaRPr lang="en-US"/>
           </a:p>
@@ -1334,7 +1336,7 @@
           <a:p>
             <a:fld id="{37563A2C-1A5C-EB4D-A972-6AE3285E62FE}" type="datetime1">
               <a:rPr lang="en-US" smtClean="0"/>
-              <a:t>4/8/26</a:t>
+              <a:t>4/9/26</a:t>
             </a:fld>
             <a:endParaRPr lang="en-US"/>
           </a:p>
@@ -1722,7 +1724,7 @@
           <a:p>
             <a:fld id="{5CC0F2D4-C57D-2449-85CE-67A0F42FDA3B}" type="datetime1">
               <a:rPr lang="en-US" smtClean="0"/>
-              <a:t>4/8/26</a:t>
+              <a:t>4/9/26</a:t>
             </a:fld>
             <a:endParaRPr lang="en-US"/>
           </a:p>
@@ -1840,7 +1842,7 @@
           <a:p>
             <a:fld id="{14165B4F-A2D4-8548-B798-9B676580887F}" type="datetime1">
               <a:rPr lang="en-US" smtClean="0"/>
-              <a:t>4/8/26</a:t>
+              <a:t>4/9/26</a:t>
             </a:fld>
             <a:endParaRPr lang="en-US"/>
           </a:p>
@@ -1935,7 +1937,7 @@
           <a:p>
             <a:fld id="{7623453A-5CCA-2B47-B840-00C815B24B38}" type="datetime1">
               <a:rPr lang="en-US" smtClean="0"/>
-              <a:t>4/8/26</a:t>
+              <a:t>4/9/26</a:t>
             </a:fld>
             <a:endParaRPr lang="en-US"/>
           </a:p>
@@ -2147,7 +2149,7 @@
           <a:p>
             <a:fld id="{EE088FA9-E09B-F247-9C69-3141F5729F41}" type="datetime1">
               <a:rPr lang="en-US" smtClean="0"/>
-              <a:t>4/8/26</a:t>
+              <a:t>4/9/26</a:t>
             </a:fld>
             <a:endParaRPr lang="en-US"/>
           </a:p>
@@ -15493,8 +15495,8 @@
           </a:prstGeom>
         </p:spPr>
       </p:pic>
-      <mc:AlternateContent xmlns:mc="http://schemas.openxmlformats.org/markup-compatibility/2006" xmlns:a14="http://schemas.microsoft.com/office/drawing/2010/main">
-        <mc:Choice Requires="a14">
+      <mc:AlternateContent xmlns:mc="http://schemas.openxmlformats.org/markup-compatibility/2006">
+        <mc:Choice xmlns:a14="http://schemas.microsoft.com/office/drawing/2010/main" Requires="a14">
           <p:sp>
             <p:nvSpPr>
               <p:cNvPr id="3" name="Content Placeholder 2">
@@ -15528,7 +15530,7 @@
                 </a:pPr>
                 <a:r>
                   <a:rPr lang="en-US" sz="1800" b="1" dirty="0"/>
-                  <a:t>Interpolation</a:t>
+                  <a:t>Interpolation (IDW)</a:t>
                 </a:r>
               </a:p>
               <a:p>
@@ -15601,11 +15603,29 @@
                 </a:r>
               </a:p>
               <a:p>
-                <a:pPr lvl="1"/>
                 <a:r>
                   <a:rPr lang="en-US" sz="1400" dirty="0"/>
-                  <a:t>Perhaps the simplest interpolation method is inverse distance weighted interpolation, which is a weighted average, using weights inverse proportional to distances from the interpolation location:</a:t>
+                  <a:t>Perhaps the </a:t>
                 </a:r>
+                <a:r>
+                  <a:rPr lang="en-US" sz="1400" u="sng" dirty="0"/>
+                  <a:t>simplest</a:t>
+                </a:r>
+                <a:r>
+                  <a:rPr lang="en-US" sz="1400" dirty="0"/>
+                  <a:t> interpolation method is </a:t>
+                </a:r>
+                <a:r>
+                  <a:rPr lang="en-US" sz="1400" b="1" dirty="0"/>
+                  <a:t>inverse distance weighted interpolation (IDW)</a:t>
+                </a:r>
+                <a:r>
+                  <a:rPr lang="en-US" sz="1400" dirty="0"/>
+                  <a:t>, which is a weighted average, using weights inverse proportional to distances from the interpolation location:</a:t>
+                </a:r>
+                <a:br>
+                  <a:rPr lang="en-US" sz="1400" dirty="0"/>
+                </a:br>
                 <a:br>
                   <a:rPr lang="en-US" sz="1400" dirty="0"/>
                 </a:br>
@@ -15853,7 +15873,7 @@
                 <a:endParaRPr lang="en-US" sz="1600" b="0" dirty="0"/>
               </a:p>
               <a:p>
-                <a:pPr marL="687388" indent="0">
+                <a:pPr marL="231775" indent="0">
                   <a:buNone/>
                 </a:pPr>
                 <a:r>
@@ -15991,7 +16011,15 @@
                 </a14:m>
                 <a:r>
                   <a:rPr lang="en-US" sz="1400" dirty="0"/>
-                  <a:t>, and the inverse distance power </a:t>
+                  <a:t>, and the </a:t>
+                </a:r>
+                <a:r>
+                  <a:rPr lang="en-US" sz="1400" u="sng" dirty="0"/>
+                  <a:t>inverse distance power</a:t>
+                </a:r>
+                <a:r>
+                  <a:rPr lang="en-US" sz="1400" dirty="0"/>
+                  <a:t> </a:t>
                 </a:r>
                 <a:r>
                   <a:rPr lang="en-US" sz="1400" i="1" dirty="0"/>
@@ -16021,7 +16049,7 @@
             </p:txBody>
           </p:sp>
         </mc:Choice>
-        <mc:Fallback xmlns="">
+        <mc:Fallback>
           <p:sp>
             <p:nvSpPr>
               <p:cNvPr id="3" name="Content Placeholder 2">
@@ -16046,7 +16074,7 @@
               <a:blipFill>
                 <a:blip r:embed="rId3"/>
                 <a:stretch>
-                  <a:fillRect l="-617" t="-840" r="-309"/>
+                  <a:fillRect l="-617" t="-840"/>
                 </a:stretch>
               </a:blipFill>
             </p:spPr>
@@ -16117,7 +16145,7 @@
         </p:blipFill>
         <p:spPr>
           <a:xfrm>
-            <a:off x="3431334" y="3429000"/>
+            <a:off x="3431334" y="3327400"/>
             <a:ext cx="2281332" cy="2377440"/>
           </a:xfrm>
           <a:prstGeom prst="rect">
@@ -16940,6 +16968,1126 @@
 <file path=ppt/slides/slide28.xml><?xml version="1.0" encoding="utf-8"?>
 <p:sld xmlns:a="http://schemas.openxmlformats.org/drawingml/2006/main" xmlns:r="http://schemas.openxmlformats.org/officeDocument/2006/relationships" xmlns:p="http://schemas.openxmlformats.org/presentationml/2006/main">
   <p:cSld>
+    <p:spTree>
+      <p:nvGrpSpPr>
+        <p:cNvPr id="1" name="">
+          <a:extLst>
+            <a:ext uri="{FF2B5EF4-FFF2-40B4-BE49-F238E27FC236}">
+              <a16:creationId xmlns:a16="http://schemas.microsoft.com/office/drawing/2014/main" id="{F242CB2D-02B0-966B-91AF-1782C43F8A79}"/>
+            </a:ext>
+          </a:extLst>
+        </p:cNvPr>
+        <p:cNvGrpSpPr/>
+        <p:nvPr/>
+      </p:nvGrpSpPr>
+      <p:grpSpPr>
+        <a:xfrm>
+          <a:off x="0" y="0"/>
+          <a:ext cx="0" cy="0"/>
+          <a:chOff x="0" y="0"/>
+          <a:chExt cx="0" cy="0"/>
+        </a:xfrm>
+      </p:grpSpPr>
+      <p:pic>
+        <p:nvPicPr>
+          <p:cNvPr id="8" name="Picture 7">
+            <a:extLst>
+              <a:ext uri="{FF2B5EF4-FFF2-40B4-BE49-F238E27FC236}">
+                <a16:creationId xmlns:a16="http://schemas.microsoft.com/office/drawing/2014/main" id="{5634B452-A53C-9FBA-F1AC-8D39E8A77CA0}"/>
+              </a:ext>
+            </a:extLst>
+          </p:cNvPr>
+          <p:cNvPicPr>
+            <a:picLocks noChangeAspect="1"/>
+          </p:cNvPicPr>
+          <p:nvPr/>
+        </p:nvPicPr>
+        <p:blipFill>
+          <a:blip r:embed="rId2"/>
+          <a:stretch>
+            <a:fillRect/>
+          </a:stretch>
+        </p:blipFill>
+        <p:spPr>
+          <a:xfrm>
+            <a:off x="5953760" y="2378891"/>
+            <a:ext cx="2377440" cy="1698172"/>
+          </a:xfrm>
+          <a:prstGeom prst="rect">
+            <a:avLst/>
+          </a:prstGeom>
+        </p:spPr>
+      </p:pic>
+      <p:pic>
+        <p:nvPicPr>
+          <p:cNvPr id="7" name="Picture 6">
+            <a:extLst>
+              <a:ext uri="{FF2B5EF4-FFF2-40B4-BE49-F238E27FC236}">
+                <a16:creationId xmlns:a16="http://schemas.microsoft.com/office/drawing/2014/main" id="{206EB7C2-67B2-1CEC-B9B8-836678561DA9}"/>
+              </a:ext>
+            </a:extLst>
+          </p:cNvPr>
+          <p:cNvPicPr>
+            <a:picLocks noChangeAspect="1"/>
+          </p:cNvPicPr>
+          <p:nvPr/>
+        </p:nvPicPr>
+        <p:blipFill>
+          <a:blip r:embed="rId3"/>
+          <a:srcRect l="14762" r="17153"/>
+          <a:stretch>
+            <a:fillRect/>
+          </a:stretch>
+        </p:blipFill>
+        <p:spPr>
+          <a:xfrm>
+            <a:off x="6095611" y="4003040"/>
+            <a:ext cx="2591189" cy="2718436"/>
+          </a:xfrm>
+          <a:prstGeom prst="rect">
+            <a:avLst/>
+          </a:prstGeom>
+        </p:spPr>
+      </p:pic>
+      <p:sp>
+        <p:nvSpPr>
+          <p:cNvPr id="3" name="Content Placeholder 2">
+            <a:extLst>
+              <a:ext uri="{FF2B5EF4-FFF2-40B4-BE49-F238E27FC236}">
+                <a16:creationId xmlns:a16="http://schemas.microsoft.com/office/drawing/2014/main" id="{97D7FBF5-C485-9730-218E-503BFB7F8CAA}"/>
+              </a:ext>
+            </a:extLst>
+          </p:cNvPr>
+          <p:cNvSpPr>
+            <a:spLocks noGrp="1"/>
+          </p:cNvSpPr>
+          <p:nvPr>
+            <p:ph idx="1"/>
+          </p:nvPr>
+        </p:nvSpPr>
+        <p:spPr>
+          <a:xfrm>
+            <a:off x="457200" y="321734"/>
+            <a:ext cx="8229600" cy="6034618"/>
+          </a:xfrm>
+        </p:spPr>
+        <p:txBody>
+          <a:bodyPr>
+            <a:noAutofit/>
+          </a:bodyPr>
+          <a:lstStyle/>
+          <a:p>
+            <a:pPr marL="0" indent="0">
+              <a:buNone/>
+            </a:pPr>
+            <a:r>
+              <a:rPr lang="en-US" sz="1800" b="1" dirty="0"/>
+              <a:t>Interpolation (Kriging)</a:t>
+            </a:r>
+            <a:endParaRPr lang="en-US" sz="1400" dirty="0"/>
+          </a:p>
+          <a:p>
+            <a:r>
+              <a:rPr lang="en-US" sz="1400" dirty="0"/>
+              <a:t>Kriging is a </a:t>
+            </a:r>
+            <a:r>
+              <a:rPr lang="en-US" sz="1400" u="sng" dirty="0"/>
+              <a:t>geostatistical interpolation method</a:t>
+            </a:r>
+            <a:r>
+              <a:rPr lang="en-US" sz="1400" dirty="0"/>
+              <a:t> that predicts values at unsampled locations using sampled data points by </a:t>
+            </a:r>
+            <a:r>
+              <a:rPr lang="en-US" sz="1400" b="1" dirty="0"/>
+              <a:t>modeling</a:t>
+            </a:r>
+            <a:r>
+              <a:rPr lang="en-US" sz="1400" dirty="0"/>
+              <a:t> their spatial autocorrelation.</a:t>
+            </a:r>
+          </a:p>
+          <a:p>
+            <a:pPr lvl="1"/>
+            <a:r>
+              <a:rPr lang="en-US" sz="1200" dirty="0"/>
+              <a:t>It computes optimal weights based on </a:t>
+            </a:r>
+            <a:r>
+              <a:rPr lang="en-US" sz="1200" u="sng" dirty="0"/>
+              <a:t>distance</a:t>
+            </a:r>
+            <a:r>
+              <a:rPr lang="en-US" sz="1200" dirty="0"/>
+              <a:t>, </a:t>
+            </a:r>
+            <a:r>
+              <a:rPr lang="en-US" sz="1200" u="sng" dirty="0"/>
+              <a:t>data arrangement</a:t>
+            </a:r>
+            <a:r>
+              <a:rPr lang="en-US" sz="1200" dirty="0"/>
+              <a:t>, and a </a:t>
+            </a:r>
+            <a:r>
+              <a:rPr lang="en-US" sz="1200" u="sng" dirty="0"/>
+              <a:t>variogram model</a:t>
+            </a:r>
+            <a:r>
+              <a:rPr lang="en-US" sz="1200" dirty="0"/>
+              <a:t>, providing both predictions and estimation variance to quantify uncertainty.</a:t>
+            </a:r>
+          </a:p>
+          <a:p>
+            <a:pPr lvl="2"/>
+            <a:r>
+              <a:rPr lang="en-US" sz="1200" dirty="0"/>
+              <a:t>Kriging is widely used in mining, geology, and environmental </a:t>
+            </a:r>
+            <a:r>
+              <a:rPr lang="en-US" sz="1400" dirty="0"/>
+              <a:t>science for mapping.</a:t>
+            </a:r>
+          </a:p>
+          <a:p>
+            <a:r>
+              <a:rPr lang="en-US" sz="1400" dirty="0"/>
+              <a:t>What is the primary advantage of Kriging over Inverse Distance Weighting (IDW)?</a:t>
+            </a:r>
+          </a:p>
+          <a:p>
+            <a:pPr lvl="1"/>
+            <a:r>
+              <a:rPr lang="en-US" sz="1200" dirty="0"/>
+              <a:t>Kriging provides a measure of </a:t>
+            </a:r>
+            <a:r>
+              <a:rPr lang="en-US" sz="1200" b="1" dirty="0"/>
+              <a:t>prediction uncertainty</a:t>
+            </a:r>
+            <a:r>
+              <a:rPr lang="en-US" sz="1200" dirty="0"/>
+              <a:t> (</a:t>
+            </a:r>
+            <a:r>
+              <a:rPr lang="en-US" sz="1200" i="1" dirty="0"/>
+              <a:t>standard error</a:t>
+            </a:r>
+            <a:r>
+              <a:rPr lang="en-US" sz="1200" dirty="0"/>
+              <a:t>), whereas IDW does not.</a:t>
+            </a:r>
+          </a:p>
+          <a:p>
+            <a:pPr lvl="1"/>
+            <a:r>
+              <a:rPr lang="en-US" sz="1200" dirty="0"/>
+              <a:t>Predicts values at unsampled locations based on a regionalized variable model</a:t>
+            </a:r>
+          </a:p>
+          <a:p>
+            <a:pPr lvl="2"/>
+            <a:r>
+              <a:rPr lang="en-US" sz="1200" dirty="0"/>
+              <a:t>Goes beyond simple distance-weighting</a:t>
+            </a:r>
+          </a:p>
+          <a:p>
+            <a:pPr lvl="2"/>
+            <a:r>
+              <a:rPr lang="en-US" sz="1200" dirty="0"/>
+              <a:t>Measures how similarity decreases with distance</a:t>
+            </a:r>
+          </a:p>
+          <a:p>
+            <a:pPr lvl="2"/>
+            <a:r>
+              <a:rPr lang="en-US" sz="1200" dirty="0"/>
+              <a:t>Uses the variogram to define weights</a:t>
+            </a:r>
+          </a:p>
+          <a:p>
+            <a:r>
+              <a:rPr lang="en-US" sz="1400" dirty="0"/>
+              <a:t>Minimizes the variance of estimation errors</a:t>
+            </a:r>
+          </a:p>
+          <a:p>
+            <a:pPr lvl="1"/>
+            <a:r>
+              <a:rPr lang="en-US" sz="1200" dirty="0"/>
+              <a:t>Provides a prediction error map (krige variance)</a:t>
+            </a:r>
+          </a:p>
+          <a:p>
+            <a:pPr lvl="1"/>
+            <a:r>
+              <a:rPr lang="en-US" sz="1200" dirty="0"/>
+              <a:t>Different types </a:t>
+            </a:r>
+            <a:r>
+              <a:rPr lang="en-US" sz="1200" baseline="30000" dirty="0"/>
+              <a:t>(Ordinary, Simple, Universal)</a:t>
+            </a:r>
+            <a:r>
+              <a:rPr lang="en-US" sz="1200" dirty="0"/>
+              <a:t> for various data trends</a:t>
+            </a:r>
+          </a:p>
+        </p:txBody>
+      </p:sp>
+      <p:sp>
+        <p:nvSpPr>
+          <p:cNvPr id="4" name="Slide Number Placeholder 3">
+            <a:extLst>
+              <a:ext uri="{FF2B5EF4-FFF2-40B4-BE49-F238E27FC236}">
+                <a16:creationId xmlns:a16="http://schemas.microsoft.com/office/drawing/2014/main" id="{996DC2BB-7122-C017-C5E5-6AAE807CEA95}"/>
+              </a:ext>
+            </a:extLst>
+          </p:cNvPr>
+          <p:cNvSpPr>
+            <a:spLocks noGrp="1"/>
+          </p:cNvSpPr>
+          <p:nvPr>
+            <p:ph type="sldNum" sz="quarter" idx="12"/>
+          </p:nvPr>
+        </p:nvSpPr>
+        <p:spPr/>
+        <p:txBody>
+          <a:bodyPr/>
+          <a:lstStyle/>
+          <a:p>
+            <a:fld id="{C0343C75-1924-D247-85A3-0CB62E67E5D1}" type="slidenum">
+              <a:rPr lang="en-US" smtClean="0"/>
+              <a:t>28</a:t>
+            </a:fld>
+            <a:endParaRPr lang="en-US" dirty="0"/>
+          </a:p>
+        </p:txBody>
+      </p:sp>
+      <p:sp>
+        <p:nvSpPr>
+          <p:cNvPr id="11" name="Content Placeholder 2">
+            <a:extLst>
+              <a:ext uri="{FF2B5EF4-FFF2-40B4-BE49-F238E27FC236}">
+                <a16:creationId xmlns:a16="http://schemas.microsoft.com/office/drawing/2014/main" id="{BFB32CA2-E724-3B9A-87A8-9CB5B14533A0}"/>
+              </a:ext>
+            </a:extLst>
+          </p:cNvPr>
+          <p:cNvSpPr txBox="1">
+            <a:spLocks/>
+          </p:cNvSpPr>
+          <p:nvPr/>
+        </p:nvSpPr>
+        <p:spPr>
+          <a:xfrm>
+            <a:off x="457200" y="4257040"/>
+            <a:ext cx="5597307" cy="2048511"/>
+          </a:xfrm>
+          <a:prstGeom prst="rect">
+            <a:avLst/>
+          </a:prstGeom>
+        </p:spPr>
+        <p:txBody>
+          <a:bodyPr vert="horz" lIns="91440" tIns="45720" rIns="91440" bIns="45720" rtlCol="0">
+            <a:noAutofit/>
+          </a:bodyPr>
+          <a:lstStyle>
+            <a:lvl1pPr marL="228600" indent="-228600" algn="l" defTabSz="914400" rtl="0" eaLnBrk="1" latinLnBrk="0" hangingPunct="1">
+              <a:lnSpc>
+                <a:spcPct val="90000"/>
+              </a:lnSpc>
+              <a:spcBef>
+                <a:spcPts val="1000"/>
+              </a:spcBef>
+              <a:buFont typeface="Arial" panose="020B0604020202020204" pitchFamily="34" charset="0"/>
+              <a:buChar char="•"/>
+              <a:defRPr sz="2000" kern="1200">
+                <a:solidFill>
+                  <a:schemeClr val="tx1"/>
+                </a:solidFill>
+                <a:latin typeface="+mn-lt"/>
+                <a:ea typeface="+mn-ea"/>
+                <a:cs typeface="+mn-cs"/>
+              </a:defRPr>
+            </a:lvl1pPr>
+            <a:lvl2pPr marL="685800" indent="-228600" algn="l" defTabSz="914400" rtl="0" eaLnBrk="1" latinLnBrk="0" hangingPunct="1">
+              <a:lnSpc>
+                <a:spcPct val="90000"/>
+              </a:lnSpc>
+              <a:spcBef>
+                <a:spcPts val="500"/>
+              </a:spcBef>
+              <a:buFont typeface="Arial" panose="020B0604020202020204" pitchFamily="34" charset="0"/>
+              <a:buChar char="•"/>
+              <a:defRPr sz="2000" kern="1200">
+                <a:solidFill>
+                  <a:schemeClr val="tx1"/>
+                </a:solidFill>
+                <a:latin typeface="+mn-lt"/>
+                <a:ea typeface="+mn-ea"/>
+                <a:cs typeface="+mn-cs"/>
+              </a:defRPr>
+            </a:lvl2pPr>
+            <a:lvl3pPr marL="1143000" indent="-228600" algn="l" defTabSz="914400" rtl="0" eaLnBrk="1" latinLnBrk="0" hangingPunct="1">
+              <a:lnSpc>
+                <a:spcPct val="90000"/>
+              </a:lnSpc>
+              <a:spcBef>
+                <a:spcPts val="500"/>
+              </a:spcBef>
+              <a:buFont typeface="Arial" panose="020B0604020202020204" pitchFamily="34" charset="0"/>
+              <a:buChar char="•"/>
+              <a:defRPr sz="2000" kern="1200">
+                <a:solidFill>
+                  <a:schemeClr val="tx1"/>
+                </a:solidFill>
+                <a:latin typeface="+mn-lt"/>
+                <a:ea typeface="+mn-ea"/>
+                <a:cs typeface="+mn-cs"/>
+              </a:defRPr>
+            </a:lvl3pPr>
+            <a:lvl4pPr marL="1600200" indent="-228600" algn="l" defTabSz="914400" rtl="0" eaLnBrk="1" latinLnBrk="0" hangingPunct="1">
+              <a:lnSpc>
+                <a:spcPct val="90000"/>
+              </a:lnSpc>
+              <a:spcBef>
+                <a:spcPts val="500"/>
+              </a:spcBef>
+              <a:buFont typeface="Arial" panose="020B0604020202020204" pitchFamily="34" charset="0"/>
+              <a:buChar char="•"/>
+              <a:defRPr sz="1800" kern="1200">
+                <a:solidFill>
+                  <a:schemeClr val="tx1"/>
+                </a:solidFill>
+                <a:latin typeface="+mn-lt"/>
+                <a:ea typeface="+mn-ea"/>
+                <a:cs typeface="+mn-cs"/>
+              </a:defRPr>
+            </a:lvl4pPr>
+            <a:lvl5pPr marL="2057400" indent="-228600" algn="l" defTabSz="914400" rtl="0" eaLnBrk="1" latinLnBrk="0" hangingPunct="1">
+              <a:lnSpc>
+                <a:spcPct val="90000"/>
+              </a:lnSpc>
+              <a:spcBef>
+                <a:spcPts val="500"/>
+              </a:spcBef>
+              <a:buFont typeface="Arial" panose="020B0604020202020204" pitchFamily="34" charset="0"/>
+              <a:buChar char="•"/>
+              <a:defRPr sz="1800" kern="1200">
+                <a:solidFill>
+                  <a:schemeClr val="tx1"/>
+                </a:solidFill>
+                <a:latin typeface="+mn-lt"/>
+                <a:ea typeface="+mn-ea"/>
+                <a:cs typeface="+mn-cs"/>
+              </a:defRPr>
+            </a:lvl5pPr>
+            <a:lvl6pPr marL="2514600" indent="-228600" algn="l" defTabSz="914400" rtl="0" eaLnBrk="1" latinLnBrk="0" hangingPunct="1">
+              <a:lnSpc>
+                <a:spcPct val="90000"/>
+              </a:lnSpc>
+              <a:spcBef>
+                <a:spcPts val="500"/>
+              </a:spcBef>
+              <a:buFont typeface="Arial" panose="020B0604020202020204" pitchFamily="34" charset="0"/>
+              <a:buChar char="•"/>
+              <a:defRPr sz="1800" kern="1200">
+                <a:solidFill>
+                  <a:schemeClr val="tx1"/>
+                </a:solidFill>
+                <a:latin typeface="+mn-lt"/>
+                <a:ea typeface="+mn-ea"/>
+                <a:cs typeface="+mn-cs"/>
+              </a:defRPr>
+            </a:lvl6pPr>
+            <a:lvl7pPr marL="2971800" indent="-228600" algn="l" defTabSz="914400" rtl="0" eaLnBrk="1" latinLnBrk="0" hangingPunct="1">
+              <a:lnSpc>
+                <a:spcPct val="90000"/>
+              </a:lnSpc>
+              <a:spcBef>
+                <a:spcPts val="500"/>
+              </a:spcBef>
+              <a:buFont typeface="Arial" panose="020B0604020202020204" pitchFamily="34" charset="0"/>
+              <a:buChar char="•"/>
+              <a:defRPr sz="1800" kern="1200">
+                <a:solidFill>
+                  <a:schemeClr val="tx1"/>
+                </a:solidFill>
+                <a:latin typeface="+mn-lt"/>
+                <a:ea typeface="+mn-ea"/>
+                <a:cs typeface="+mn-cs"/>
+              </a:defRPr>
+            </a:lvl7pPr>
+            <a:lvl8pPr marL="3429000" indent="-228600" algn="l" defTabSz="914400" rtl="0" eaLnBrk="1" latinLnBrk="0" hangingPunct="1">
+              <a:lnSpc>
+                <a:spcPct val="90000"/>
+              </a:lnSpc>
+              <a:spcBef>
+                <a:spcPts val="500"/>
+              </a:spcBef>
+              <a:buFont typeface="Arial" panose="020B0604020202020204" pitchFamily="34" charset="0"/>
+              <a:buChar char="•"/>
+              <a:defRPr sz="1800" kern="1200">
+                <a:solidFill>
+                  <a:schemeClr val="tx1"/>
+                </a:solidFill>
+                <a:latin typeface="+mn-lt"/>
+                <a:ea typeface="+mn-ea"/>
+                <a:cs typeface="+mn-cs"/>
+              </a:defRPr>
+            </a:lvl8pPr>
+            <a:lvl9pPr marL="3886200" indent="-228600" algn="l" defTabSz="914400" rtl="0" eaLnBrk="1" latinLnBrk="0" hangingPunct="1">
+              <a:lnSpc>
+                <a:spcPct val="90000"/>
+              </a:lnSpc>
+              <a:spcBef>
+                <a:spcPts val="500"/>
+              </a:spcBef>
+              <a:buFont typeface="Arial" panose="020B0604020202020204" pitchFamily="34" charset="0"/>
+              <a:buChar char="•"/>
+              <a:defRPr sz="1800" kern="1200">
+                <a:solidFill>
+                  <a:schemeClr val="tx1"/>
+                </a:solidFill>
+                <a:latin typeface="+mn-lt"/>
+                <a:ea typeface="+mn-ea"/>
+                <a:cs typeface="+mn-cs"/>
+              </a:defRPr>
+            </a:lvl9pPr>
+          </a:lstStyle>
+          <a:p>
+            <a:pPr marL="0" indent="0">
+              <a:lnSpc>
+                <a:spcPct val="100000"/>
+              </a:lnSpc>
+              <a:spcBef>
+                <a:spcPts val="400"/>
+              </a:spcBef>
+              <a:buNone/>
+            </a:pPr>
+            <a:r>
+              <a:rPr lang="en-US" sz="1100" b="1" dirty="0" err="1">
+                <a:solidFill>
+                  <a:srgbClr val="C00000"/>
+                </a:solidFill>
+                <a:latin typeface="Consolas" panose="020B0609020204030204" pitchFamily="49" charset="0"/>
+                <a:cs typeface="Consolas" panose="020B0609020204030204" pitchFamily="49" charset="0"/>
+              </a:rPr>
+              <a:t>v.m</a:t>
+            </a:r>
+            <a:r>
+              <a:rPr lang="en-US" sz="1100" b="1" dirty="0">
+                <a:solidFill>
+                  <a:srgbClr val="C00000"/>
+                </a:solidFill>
+                <a:latin typeface="Consolas" panose="020B0609020204030204" pitchFamily="49" charset="0"/>
+                <a:cs typeface="Consolas" panose="020B0609020204030204" pitchFamily="49" charset="0"/>
+              </a:rPr>
+              <a:t> &lt;- </a:t>
+            </a:r>
+            <a:r>
+              <a:rPr lang="en-US" sz="1100" b="1" dirty="0" err="1">
+                <a:solidFill>
+                  <a:srgbClr val="C00000"/>
+                </a:solidFill>
+                <a:latin typeface="Consolas" panose="020B0609020204030204" pitchFamily="49" charset="0"/>
+                <a:cs typeface="Consolas" panose="020B0609020204030204" pitchFamily="49" charset="0"/>
+              </a:rPr>
+              <a:t>fit.variogram</a:t>
+            </a:r>
+            <a:r>
+              <a:rPr lang="en-US" sz="1100" b="1" dirty="0">
+                <a:solidFill>
+                  <a:srgbClr val="C00000"/>
+                </a:solidFill>
+                <a:latin typeface="Consolas" panose="020B0609020204030204" pitchFamily="49" charset="0"/>
+                <a:cs typeface="Consolas" panose="020B0609020204030204" pitchFamily="49" charset="0"/>
+              </a:rPr>
+              <a:t>(v, </a:t>
+            </a:r>
+            <a:r>
+              <a:rPr lang="en-US" sz="1100" b="1" dirty="0" err="1">
+                <a:solidFill>
+                  <a:srgbClr val="C00000"/>
+                </a:solidFill>
+                <a:latin typeface="Consolas" panose="020B0609020204030204" pitchFamily="49" charset="0"/>
+                <a:cs typeface="Consolas" panose="020B0609020204030204" pitchFamily="49" charset="0"/>
+              </a:rPr>
+              <a:t>vgm</a:t>
+            </a:r>
+            <a:r>
+              <a:rPr lang="en-US" sz="1100" b="1" dirty="0">
+                <a:solidFill>
+                  <a:srgbClr val="C00000"/>
+                </a:solidFill>
+                <a:latin typeface="Consolas" panose="020B0609020204030204" pitchFamily="49" charset="0"/>
+                <a:cs typeface="Consolas" panose="020B0609020204030204" pitchFamily="49" charset="0"/>
+              </a:rPr>
+              <a:t>(1, "Exp", 50000, 1))</a:t>
+            </a:r>
+            <a:br>
+              <a:rPr lang="en-US" sz="1100" b="1" dirty="0">
+                <a:solidFill>
+                  <a:srgbClr val="C00000"/>
+                </a:solidFill>
+                <a:latin typeface="Consolas" panose="020B0609020204030204" pitchFamily="49" charset="0"/>
+                <a:cs typeface="Consolas" panose="020B0609020204030204" pitchFamily="49" charset="0"/>
+              </a:rPr>
+            </a:br>
+            <a:r>
+              <a:rPr lang="en-US" sz="1100" b="1" dirty="0">
+                <a:solidFill>
+                  <a:schemeClr val="accent5">
+                    <a:lumMod val="60000"/>
+                    <a:lumOff val="40000"/>
+                  </a:schemeClr>
+                </a:solidFill>
+                <a:latin typeface="Consolas" panose="020B0609020204030204" pitchFamily="49" charset="0"/>
+                <a:cs typeface="Consolas" panose="020B0609020204030204" pitchFamily="49" charset="0"/>
+              </a:rPr>
+              <a:t># Fitting variogram models</a:t>
+            </a:r>
+          </a:p>
+          <a:p>
+            <a:pPr marL="0" indent="0">
+              <a:lnSpc>
+                <a:spcPct val="100000"/>
+              </a:lnSpc>
+              <a:spcBef>
+                <a:spcPts val="400"/>
+              </a:spcBef>
+              <a:buNone/>
+            </a:pPr>
+            <a:endParaRPr lang="en-US" sz="1100" b="1" dirty="0">
+              <a:solidFill>
+                <a:srgbClr val="0070C0"/>
+              </a:solidFill>
+              <a:latin typeface="Consolas" panose="020B0609020204030204" pitchFamily="49" charset="0"/>
+              <a:cs typeface="Consolas" panose="020B0609020204030204" pitchFamily="49" charset="0"/>
+            </a:endParaRPr>
+          </a:p>
+          <a:p>
+            <a:pPr marL="0" indent="0">
+              <a:lnSpc>
+                <a:spcPct val="100000"/>
+              </a:lnSpc>
+              <a:spcBef>
+                <a:spcPts val="400"/>
+              </a:spcBef>
+              <a:buNone/>
+            </a:pPr>
+            <a:r>
+              <a:rPr lang="en-US" sz="1100" b="1" dirty="0">
+                <a:solidFill>
+                  <a:srgbClr val="0070C0"/>
+                </a:solidFill>
+                <a:latin typeface="Consolas" panose="020B0609020204030204" pitchFamily="49" charset="0"/>
+                <a:cs typeface="Consolas" panose="020B0609020204030204" pitchFamily="49" charset="0"/>
+              </a:rPr>
+              <a:t>k &lt;- </a:t>
+            </a:r>
+            <a:r>
+              <a:rPr lang="en-US" sz="1100" b="1" dirty="0">
+                <a:solidFill>
+                  <a:srgbClr val="0070C0"/>
+                </a:solidFill>
+                <a:highlight>
+                  <a:srgbClr val="FFFF00"/>
+                </a:highlight>
+                <a:latin typeface="Consolas" panose="020B0609020204030204" pitchFamily="49" charset="0"/>
+                <a:cs typeface="Consolas" panose="020B0609020204030204" pitchFamily="49" charset="0"/>
+              </a:rPr>
+              <a:t>krige</a:t>
+            </a:r>
+            <a:r>
+              <a:rPr lang="en-US" sz="1100" b="1" dirty="0">
+                <a:solidFill>
+                  <a:srgbClr val="0070C0"/>
+                </a:solidFill>
+                <a:latin typeface="Consolas" panose="020B0609020204030204" pitchFamily="49" charset="0"/>
+                <a:cs typeface="Consolas" panose="020B0609020204030204" pitchFamily="49" charset="0"/>
+              </a:rPr>
+              <a:t>(NO2~1, no2.sf, </a:t>
+            </a:r>
+            <a:r>
+              <a:rPr lang="en-US" sz="1100" b="1" dirty="0" err="1">
+                <a:solidFill>
+                  <a:srgbClr val="0070C0"/>
+                </a:solidFill>
+                <a:latin typeface="Consolas" panose="020B0609020204030204" pitchFamily="49" charset="0"/>
+                <a:cs typeface="Consolas" panose="020B0609020204030204" pitchFamily="49" charset="0"/>
+              </a:rPr>
+              <a:t>grd</a:t>
+            </a:r>
+            <a:r>
+              <a:rPr lang="en-US" sz="1100" b="1" dirty="0">
+                <a:solidFill>
+                  <a:srgbClr val="0070C0"/>
+                </a:solidFill>
+                <a:latin typeface="Consolas" panose="020B0609020204030204" pitchFamily="49" charset="0"/>
+                <a:cs typeface="Consolas" panose="020B0609020204030204" pitchFamily="49" charset="0"/>
+              </a:rPr>
+              <a:t>, </a:t>
+            </a:r>
+            <a:r>
+              <a:rPr lang="en-US" sz="1100" b="1" dirty="0" err="1">
+                <a:solidFill>
+                  <a:srgbClr val="0070C0"/>
+                </a:solidFill>
+                <a:highlight>
+                  <a:srgbClr val="FFFF00"/>
+                </a:highlight>
+                <a:latin typeface="Consolas" panose="020B0609020204030204" pitchFamily="49" charset="0"/>
+                <a:cs typeface="Consolas" panose="020B0609020204030204" pitchFamily="49" charset="0"/>
+              </a:rPr>
+              <a:t>v.m</a:t>
+            </a:r>
+            <a:r>
+              <a:rPr lang="en-US" sz="1100" b="1" dirty="0">
+                <a:solidFill>
+                  <a:srgbClr val="0070C0"/>
+                </a:solidFill>
+                <a:latin typeface="Consolas" panose="020B0609020204030204" pitchFamily="49" charset="0"/>
+                <a:cs typeface="Consolas" panose="020B0609020204030204" pitchFamily="49" charset="0"/>
+              </a:rPr>
+              <a:t>) </a:t>
+            </a:r>
+            <a:r>
+              <a:rPr lang="en-US" sz="1100" b="1" dirty="0">
+                <a:solidFill>
+                  <a:schemeClr val="accent5">
+                    <a:lumMod val="60000"/>
+                    <a:lumOff val="40000"/>
+                  </a:schemeClr>
+                </a:solidFill>
+                <a:latin typeface="Consolas" panose="020B0609020204030204" pitchFamily="49" charset="0"/>
+                <a:cs typeface="Consolas" panose="020B0609020204030204" pitchFamily="49" charset="0"/>
+              </a:rPr>
+              <a:t># Using ordinary kriging</a:t>
+            </a:r>
+          </a:p>
+          <a:p>
+            <a:pPr marL="0" indent="0">
+              <a:lnSpc>
+                <a:spcPct val="100000"/>
+              </a:lnSpc>
+              <a:spcBef>
+                <a:spcPts val="400"/>
+              </a:spcBef>
+              <a:buNone/>
+            </a:pPr>
+            <a:endParaRPr lang="en-US" sz="1100" b="1" dirty="0">
+              <a:solidFill>
+                <a:srgbClr val="0070C0"/>
+              </a:solidFill>
+              <a:latin typeface="Consolas" panose="020B0609020204030204" pitchFamily="49" charset="0"/>
+              <a:cs typeface="Consolas" panose="020B0609020204030204" pitchFamily="49" charset="0"/>
+            </a:endParaRPr>
+          </a:p>
+          <a:p>
+            <a:pPr marL="0" indent="0">
+              <a:lnSpc>
+                <a:spcPct val="100000"/>
+              </a:lnSpc>
+              <a:spcBef>
+                <a:spcPts val="400"/>
+              </a:spcBef>
+              <a:buNone/>
+            </a:pPr>
+            <a:r>
+              <a:rPr lang="en-US" sz="1100" b="1" dirty="0" err="1">
+                <a:solidFill>
+                  <a:srgbClr val="0070C0"/>
+                </a:solidFill>
+                <a:latin typeface="Consolas" panose="020B0609020204030204" pitchFamily="49" charset="0"/>
+                <a:cs typeface="Consolas" panose="020B0609020204030204" pitchFamily="49" charset="0"/>
+              </a:rPr>
+              <a:t>ggplot</a:t>
+            </a:r>
+            <a:r>
+              <a:rPr lang="en-US" sz="1100" b="1" dirty="0">
+                <a:solidFill>
+                  <a:srgbClr val="0070C0"/>
+                </a:solidFill>
+                <a:latin typeface="Consolas" panose="020B0609020204030204" pitchFamily="49" charset="0"/>
+                <a:cs typeface="Consolas" panose="020B0609020204030204" pitchFamily="49" charset="0"/>
+              </a:rPr>
+              <a:t>() + </a:t>
+            </a:r>
+            <a:r>
+              <a:rPr lang="en-US" sz="1100" b="1" dirty="0" err="1">
+                <a:solidFill>
+                  <a:srgbClr val="0070C0"/>
+                </a:solidFill>
+                <a:latin typeface="Consolas" panose="020B0609020204030204" pitchFamily="49" charset="0"/>
+                <a:cs typeface="Consolas" panose="020B0609020204030204" pitchFamily="49" charset="0"/>
+              </a:rPr>
+              <a:t>geom_stars</a:t>
+            </a:r>
+            <a:r>
+              <a:rPr lang="en-US" sz="1100" b="1" dirty="0">
+                <a:solidFill>
+                  <a:srgbClr val="0070C0"/>
+                </a:solidFill>
+                <a:latin typeface="Consolas" panose="020B0609020204030204" pitchFamily="49" charset="0"/>
+                <a:cs typeface="Consolas" panose="020B0609020204030204" pitchFamily="49" charset="0"/>
+              </a:rPr>
+              <a:t>(data = k, </a:t>
+            </a:r>
+            <a:r>
+              <a:rPr lang="en-US" sz="1100" b="1" dirty="0" err="1">
+                <a:solidFill>
+                  <a:srgbClr val="0070C0"/>
+                </a:solidFill>
+                <a:latin typeface="Consolas" panose="020B0609020204030204" pitchFamily="49" charset="0"/>
+                <a:cs typeface="Consolas" panose="020B0609020204030204" pitchFamily="49" charset="0"/>
+              </a:rPr>
+              <a:t>aes</a:t>
+            </a:r>
+            <a:r>
+              <a:rPr lang="en-US" sz="1100" b="1" dirty="0">
+                <a:solidFill>
+                  <a:srgbClr val="0070C0"/>
+                </a:solidFill>
+                <a:latin typeface="Consolas" panose="020B0609020204030204" pitchFamily="49" charset="0"/>
+                <a:cs typeface="Consolas" panose="020B0609020204030204" pitchFamily="49" charset="0"/>
+              </a:rPr>
+              <a:t>(fill = var1.pred, x = x, y = y)) + </a:t>
+            </a:r>
+          </a:p>
+          <a:p>
+            <a:pPr marL="0" indent="0">
+              <a:lnSpc>
+                <a:spcPct val="100000"/>
+              </a:lnSpc>
+              <a:spcBef>
+                <a:spcPts val="400"/>
+              </a:spcBef>
+              <a:buNone/>
+            </a:pPr>
+            <a:r>
+              <a:rPr lang="en-US" sz="1100" b="1" dirty="0">
+                <a:solidFill>
+                  <a:srgbClr val="0070C0"/>
+                </a:solidFill>
+                <a:latin typeface="Consolas" panose="020B0609020204030204" pitchFamily="49" charset="0"/>
+                <a:cs typeface="Consolas" panose="020B0609020204030204" pitchFamily="49" charset="0"/>
+              </a:rPr>
+              <a:t>    </a:t>
+            </a:r>
+            <a:r>
+              <a:rPr lang="en-US" sz="1100" b="1" dirty="0" err="1">
+                <a:solidFill>
+                  <a:srgbClr val="0070C0"/>
+                </a:solidFill>
+                <a:latin typeface="Consolas" panose="020B0609020204030204" pitchFamily="49" charset="0"/>
+                <a:cs typeface="Consolas" panose="020B0609020204030204" pitchFamily="49" charset="0"/>
+              </a:rPr>
+              <a:t>xlab</a:t>
+            </a:r>
+            <a:r>
+              <a:rPr lang="en-US" sz="1100" b="1" dirty="0">
+                <a:solidFill>
+                  <a:srgbClr val="0070C0"/>
+                </a:solidFill>
+                <a:latin typeface="Consolas" panose="020B0609020204030204" pitchFamily="49" charset="0"/>
+                <a:cs typeface="Consolas" panose="020B0609020204030204" pitchFamily="49" charset="0"/>
+              </a:rPr>
+              <a:t>(NULL) + </a:t>
+            </a:r>
+            <a:r>
+              <a:rPr lang="en-US" sz="1100" b="1" dirty="0" err="1">
+                <a:solidFill>
+                  <a:srgbClr val="0070C0"/>
+                </a:solidFill>
+                <a:latin typeface="Consolas" panose="020B0609020204030204" pitchFamily="49" charset="0"/>
+                <a:cs typeface="Consolas" panose="020B0609020204030204" pitchFamily="49" charset="0"/>
+              </a:rPr>
+              <a:t>ylab</a:t>
+            </a:r>
+            <a:r>
+              <a:rPr lang="en-US" sz="1100" b="1" dirty="0">
+                <a:solidFill>
+                  <a:srgbClr val="0070C0"/>
+                </a:solidFill>
+                <a:latin typeface="Consolas" panose="020B0609020204030204" pitchFamily="49" charset="0"/>
+                <a:cs typeface="Consolas" panose="020B0609020204030204" pitchFamily="49" charset="0"/>
+              </a:rPr>
+              <a:t>(NULL) +</a:t>
+            </a:r>
+          </a:p>
+          <a:p>
+            <a:pPr marL="0" indent="0">
+              <a:lnSpc>
+                <a:spcPct val="100000"/>
+              </a:lnSpc>
+              <a:spcBef>
+                <a:spcPts val="400"/>
+              </a:spcBef>
+              <a:buNone/>
+            </a:pPr>
+            <a:r>
+              <a:rPr lang="en-US" sz="1100" b="1" dirty="0">
+                <a:solidFill>
+                  <a:srgbClr val="0070C0"/>
+                </a:solidFill>
+                <a:latin typeface="Consolas" panose="020B0609020204030204" pitchFamily="49" charset="0"/>
+                <a:cs typeface="Consolas" panose="020B0609020204030204" pitchFamily="49" charset="0"/>
+              </a:rPr>
+              <a:t>    </a:t>
+            </a:r>
+            <a:r>
+              <a:rPr lang="en-US" sz="1100" b="1" dirty="0" err="1">
+                <a:solidFill>
+                  <a:srgbClr val="0070C0"/>
+                </a:solidFill>
+                <a:latin typeface="Consolas" panose="020B0609020204030204" pitchFamily="49" charset="0"/>
+                <a:cs typeface="Consolas" panose="020B0609020204030204" pitchFamily="49" charset="0"/>
+              </a:rPr>
+              <a:t>geom_sf</a:t>
+            </a:r>
+            <a:r>
+              <a:rPr lang="en-US" sz="1100" b="1" dirty="0">
+                <a:solidFill>
+                  <a:srgbClr val="0070C0"/>
+                </a:solidFill>
+                <a:latin typeface="Consolas" panose="020B0609020204030204" pitchFamily="49" charset="0"/>
+                <a:cs typeface="Consolas" panose="020B0609020204030204" pitchFamily="49" charset="0"/>
+              </a:rPr>
+              <a:t>(data = </a:t>
+            </a:r>
+            <a:r>
+              <a:rPr lang="en-US" sz="1100" b="1" dirty="0" err="1">
+                <a:solidFill>
+                  <a:srgbClr val="0070C0"/>
+                </a:solidFill>
+                <a:latin typeface="Consolas" panose="020B0609020204030204" pitchFamily="49" charset="0"/>
+                <a:cs typeface="Consolas" panose="020B0609020204030204" pitchFamily="49" charset="0"/>
+              </a:rPr>
+              <a:t>st_cast</a:t>
+            </a:r>
+            <a:r>
+              <a:rPr lang="en-US" sz="1100" b="1" dirty="0">
+                <a:solidFill>
+                  <a:srgbClr val="0070C0"/>
+                </a:solidFill>
+                <a:latin typeface="Consolas" panose="020B0609020204030204" pitchFamily="49" charset="0"/>
+                <a:cs typeface="Consolas" panose="020B0609020204030204" pitchFamily="49" charset="0"/>
+              </a:rPr>
+              <a:t>(de, "MULTILINESTRING")) + </a:t>
+            </a:r>
+          </a:p>
+          <a:p>
+            <a:pPr marL="0" indent="0">
+              <a:lnSpc>
+                <a:spcPct val="100000"/>
+              </a:lnSpc>
+              <a:spcBef>
+                <a:spcPts val="400"/>
+              </a:spcBef>
+              <a:buNone/>
+            </a:pPr>
+            <a:r>
+              <a:rPr lang="en-US" sz="1100" b="1" dirty="0">
+                <a:solidFill>
+                  <a:srgbClr val="0070C0"/>
+                </a:solidFill>
+                <a:latin typeface="Consolas" panose="020B0609020204030204" pitchFamily="49" charset="0"/>
+                <a:cs typeface="Consolas" panose="020B0609020204030204" pitchFamily="49" charset="0"/>
+              </a:rPr>
+              <a:t>    </a:t>
+            </a:r>
+            <a:r>
+              <a:rPr lang="en-US" sz="1100" b="1" dirty="0" err="1">
+                <a:solidFill>
+                  <a:srgbClr val="0070C0"/>
+                </a:solidFill>
+                <a:latin typeface="Consolas" panose="020B0609020204030204" pitchFamily="49" charset="0"/>
+                <a:cs typeface="Consolas" panose="020B0609020204030204" pitchFamily="49" charset="0"/>
+              </a:rPr>
+              <a:t>geom_sf</a:t>
+            </a:r>
+            <a:r>
+              <a:rPr lang="en-US" sz="1100" b="1" dirty="0">
+                <a:solidFill>
+                  <a:srgbClr val="0070C0"/>
+                </a:solidFill>
+                <a:latin typeface="Consolas" panose="020B0609020204030204" pitchFamily="49" charset="0"/>
+                <a:cs typeface="Consolas" panose="020B0609020204030204" pitchFamily="49" charset="0"/>
+              </a:rPr>
+              <a:t>(data = no2.sf) + </a:t>
+            </a:r>
+            <a:r>
+              <a:rPr lang="en-US" sz="1100" b="1" dirty="0" err="1">
+                <a:solidFill>
+                  <a:srgbClr val="0070C0"/>
+                </a:solidFill>
+                <a:latin typeface="Consolas" panose="020B0609020204030204" pitchFamily="49" charset="0"/>
+                <a:cs typeface="Consolas" panose="020B0609020204030204" pitchFamily="49" charset="0"/>
+              </a:rPr>
+              <a:t>coord_sf</a:t>
+            </a:r>
+            <a:r>
+              <a:rPr lang="en-US" sz="1100" b="1" dirty="0">
+                <a:solidFill>
+                  <a:srgbClr val="0070C0"/>
+                </a:solidFill>
+                <a:latin typeface="Consolas" panose="020B0609020204030204" pitchFamily="49" charset="0"/>
+                <a:cs typeface="Consolas" panose="020B0609020204030204" pitchFamily="49" charset="0"/>
+              </a:rPr>
+              <a:t>(</a:t>
+            </a:r>
+            <a:r>
+              <a:rPr lang="en-US" sz="1100" b="1" dirty="0" err="1">
+                <a:solidFill>
+                  <a:srgbClr val="0070C0"/>
+                </a:solidFill>
+                <a:latin typeface="Consolas" panose="020B0609020204030204" pitchFamily="49" charset="0"/>
+                <a:cs typeface="Consolas" panose="020B0609020204030204" pitchFamily="49" charset="0"/>
+              </a:rPr>
+              <a:t>lims_method</a:t>
+            </a:r>
+            <a:r>
+              <a:rPr lang="en-US" sz="1100" b="1" dirty="0">
+                <a:solidFill>
+                  <a:srgbClr val="0070C0"/>
+                </a:solidFill>
+                <a:latin typeface="Consolas" panose="020B0609020204030204" pitchFamily="49" charset="0"/>
+                <a:cs typeface="Consolas" panose="020B0609020204030204" pitchFamily="49" charset="0"/>
+              </a:rPr>
+              <a:t> = "</a:t>
+            </a:r>
+            <a:r>
+              <a:rPr lang="en-US" sz="1100" b="1" dirty="0" err="1">
+                <a:solidFill>
+                  <a:srgbClr val="0070C0"/>
+                </a:solidFill>
+                <a:latin typeface="Consolas" panose="020B0609020204030204" pitchFamily="49" charset="0"/>
+                <a:cs typeface="Consolas" panose="020B0609020204030204" pitchFamily="49" charset="0"/>
+              </a:rPr>
+              <a:t>geometry_bbox</a:t>
+            </a:r>
+            <a:r>
+              <a:rPr lang="en-US" sz="1100" b="1" dirty="0">
+                <a:solidFill>
+                  <a:srgbClr val="0070C0"/>
+                </a:solidFill>
+                <a:latin typeface="Consolas" panose="020B0609020204030204" pitchFamily="49" charset="0"/>
+                <a:cs typeface="Consolas" panose="020B0609020204030204" pitchFamily="49" charset="0"/>
+              </a:rPr>
+              <a:t>")</a:t>
+            </a:r>
+          </a:p>
+        </p:txBody>
+      </p:sp>
+      <p:cxnSp>
+        <p:nvCxnSpPr>
+          <p:cNvPr id="10" name="Straight Arrow Connector 9">
+            <a:extLst>
+              <a:ext uri="{FF2B5EF4-FFF2-40B4-BE49-F238E27FC236}">
+                <a16:creationId xmlns:a16="http://schemas.microsoft.com/office/drawing/2014/main" id="{710CF4D4-8374-FC12-C650-4D6AE27F4510}"/>
+              </a:ext>
+            </a:extLst>
+          </p:cNvPr>
+          <p:cNvCxnSpPr>
+            <a:cxnSpLocks/>
+          </p:cNvCxnSpPr>
+          <p:nvPr/>
+        </p:nvCxnSpPr>
+        <p:spPr>
+          <a:xfrm flipV="1">
+            <a:off x="4358640" y="3755118"/>
+            <a:ext cx="1695867" cy="623842"/>
+          </a:xfrm>
+          <a:prstGeom prst="straightConnector1">
+            <a:avLst/>
+          </a:prstGeom>
+          <a:ln>
+            <a:solidFill>
+              <a:srgbClr val="C00000"/>
+            </a:solidFill>
+            <a:tailEnd type="triangle"/>
+          </a:ln>
+        </p:spPr>
+        <p:style>
+          <a:lnRef idx="2">
+            <a:schemeClr val="accent1"/>
+          </a:lnRef>
+          <a:fillRef idx="0">
+            <a:schemeClr val="accent1"/>
+          </a:fillRef>
+          <a:effectRef idx="1">
+            <a:schemeClr val="accent1"/>
+          </a:effectRef>
+          <a:fontRef idx="minor">
+            <a:schemeClr val="tx1"/>
+          </a:fontRef>
+        </p:style>
+      </p:cxnSp>
+      <p:sp>
+        <p:nvSpPr>
+          <p:cNvPr id="16" name="TextBox 15">
+            <a:extLst>
+              <a:ext uri="{FF2B5EF4-FFF2-40B4-BE49-F238E27FC236}">
+                <a16:creationId xmlns:a16="http://schemas.microsoft.com/office/drawing/2014/main" id="{139E7944-2AE4-BA40-8A6E-8B2297938897}"/>
+              </a:ext>
+            </a:extLst>
+          </p:cNvPr>
+          <p:cNvSpPr txBox="1"/>
+          <p:nvPr/>
+        </p:nvSpPr>
+        <p:spPr>
+          <a:xfrm>
+            <a:off x="457200" y="6290589"/>
+            <a:ext cx="4114800" cy="430887"/>
+          </a:xfrm>
+          <a:prstGeom prst="rect">
+            <a:avLst/>
+          </a:prstGeom>
+          <a:solidFill>
+            <a:srgbClr val="FFD84C"/>
+          </a:solidFill>
+        </p:spPr>
+        <p:txBody>
+          <a:bodyPr wrap="square" rtlCol="0">
+            <a:spAutoFit/>
+          </a:bodyPr>
+          <a:lstStyle/>
+          <a:p>
+            <a:r>
+              <a:rPr lang="en-US" sz="1050" dirty="0"/>
+              <a:t>Check full code at:</a:t>
+            </a:r>
+          </a:p>
+          <a:p>
+            <a:r>
+              <a:rPr lang="en-US" sz="1050" dirty="0">
+                <a:hlinkClick r:id="rId4"/>
+              </a:rPr>
+              <a:t>https://r-spatial.org/book/12-Interpolation.html</a:t>
+            </a:r>
+            <a:endParaRPr lang="en-US" sz="1050" dirty="0"/>
+          </a:p>
+        </p:txBody>
+      </p:sp>
+    </p:spTree>
+    <p:extLst>
+      <p:ext uri="{BB962C8B-B14F-4D97-AF65-F5344CB8AC3E}">
+        <p14:creationId xmlns:p14="http://schemas.microsoft.com/office/powerpoint/2010/main" val="276588659"/>
+      </p:ext>
+    </p:extLst>
+  </p:cSld>
+  <p:clrMapOvr>
+    <a:masterClrMapping/>
+  </p:clrMapOvr>
+</p:sld>
+</file>
+
+<file path=ppt/slides/slide29.xml><?xml version="1.0" encoding="utf-8"?>
+<p:sld xmlns:a="http://schemas.openxmlformats.org/drawingml/2006/main" xmlns:r="http://schemas.openxmlformats.org/officeDocument/2006/relationships" xmlns:p="http://schemas.openxmlformats.org/presentationml/2006/main">
+  <p:cSld>
     <p:bg>
       <p:bgPr>
         <a:solidFill>
@@ -17085,7 +18233,7 @@
           <a:p>
             <a:fld id="{C0343C75-1924-D247-85A3-0CB62E67E5D1}" type="slidenum">
               <a:rPr lang="en-US" smtClean="0"/>
-              <a:t>28</a:t>
+              <a:t>29</a:t>
             </a:fld>
             <a:endParaRPr lang="en-US"/>
           </a:p>
@@ -17095,166 +18243,6 @@
     <p:extLst>
       <p:ext uri="{BB962C8B-B14F-4D97-AF65-F5344CB8AC3E}">
         <p14:creationId xmlns:p14="http://schemas.microsoft.com/office/powerpoint/2010/main" val="2623367171"/>
-      </p:ext>
-    </p:extLst>
-  </p:cSld>
-  <p:clrMapOvr>
-    <a:masterClrMapping/>
-  </p:clrMapOvr>
-</p:sld>
-</file>
-
-<file path=ppt/slides/slide29.xml><?xml version="1.0" encoding="utf-8"?>
-<p:sld xmlns:a="http://schemas.openxmlformats.org/drawingml/2006/main" xmlns:r="http://schemas.openxmlformats.org/officeDocument/2006/relationships" xmlns:p="http://schemas.openxmlformats.org/presentationml/2006/main">
-  <p:cSld>
-    <p:bg>
-      <p:bgPr>
-        <a:solidFill>
-          <a:schemeClr val="bg2"/>
-        </a:solidFill>
-        <a:effectLst/>
-      </p:bgPr>
-    </p:bg>
-    <p:spTree>
-      <p:nvGrpSpPr>
-        <p:cNvPr id="1" name=""/>
-        <p:cNvGrpSpPr/>
-        <p:nvPr/>
-      </p:nvGrpSpPr>
-      <p:grpSpPr>
-        <a:xfrm>
-          <a:off x="0" y="0"/>
-          <a:ext cx="0" cy="0"/>
-          <a:chOff x="0" y="0"/>
-          <a:chExt cx="0" cy="0"/>
-        </a:xfrm>
-      </p:grpSpPr>
-      <p:sp>
-        <p:nvSpPr>
-          <p:cNvPr id="2" name="Title 1">
-            <a:extLst>
-              <a:ext uri="{FF2B5EF4-FFF2-40B4-BE49-F238E27FC236}">
-                <a16:creationId xmlns:a16="http://schemas.microsoft.com/office/drawing/2014/main" id="{EE1778A9-DF75-760E-5946-D5CB9BB0CCCA}"/>
-              </a:ext>
-            </a:extLst>
-          </p:cNvPr>
-          <p:cNvSpPr>
-            <a:spLocks noGrp="1"/>
-          </p:cNvSpPr>
-          <p:nvPr>
-            <p:ph type="title"/>
-          </p:nvPr>
-        </p:nvSpPr>
-        <p:spPr/>
-        <p:txBody>
-          <a:bodyPr/>
-          <a:lstStyle/>
-          <a:p>
-            <a:r>
-              <a:rPr lang="en-US" dirty="0"/>
-              <a:t>Next</a:t>
-            </a:r>
-            <a:br>
-              <a:rPr lang="en-US" dirty="0"/>
-            </a:br>
-            <a:r>
-              <a:rPr lang="en-US" b="1" dirty="0"/>
-              <a:t>Spatial Modeling</a:t>
-            </a:r>
-          </a:p>
-        </p:txBody>
-      </p:sp>
-      <p:sp>
-        <p:nvSpPr>
-          <p:cNvPr id="3" name="Content Placeholder 2">
-            <a:extLst>
-              <a:ext uri="{FF2B5EF4-FFF2-40B4-BE49-F238E27FC236}">
-                <a16:creationId xmlns:a16="http://schemas.microsoft.com/office/drawing/2014/main" id="{9D8C69DB-0DB5-ECA1-24D0-4233342F2729}"/>
-              </a:ext>
-            </a:extLst>
-          </p:cNvPr>
-          <p:cNvSpPr>
-            <a:spLocks noGrp="1"/>
-          </p:cNvSpPr>
-          <p:nvPr>
-            <p:ph idx="1"/>
-          </p:nvPr>
-        </p:nvSpPr>
-        <p:spPr/>
-        <p:txBody>
-          <a:bodyPr/>
-          <a:lstStyle/>
-          <a:p>
-            <a:r>
-              <a:rPr lang="en-US" dirty="0"/>
-              <a:t>Spatial Regression</a:t>
-            </a:r>
-            <a:br>
-              <a:rPr lang="en-US" dirty="0"/>
-            </a:br>
-            <a:r>
-              <a:rPr lang="en-US" dirty="0">
-                <a:hlinkClick r:id="rId2"/>
-              </a:rPr>
-              <a:t>https://r-spatial.org/book/16-SpatialRegression.html</a:t>
-            </a:r>
-            <a:endParaRPr lang="en-US" dirty="0"/>
-          </a:p>
-          <a:p>
-            <a:r>
-              <a:rPr lang="en-US" dirty="0"/>
-              <a:t>Spatial Econometrics Models</a:t>
-            </a:r>
-            <a:br>
-              <a:rPr lang="en-US" dirty="0"/>
-            </a:br>
-            <a:r>
-              <a:rPr lang="en-US" dirty="0">
-                <a:hlinkClick r:id="rId3"/>
-              </a:rPr>
-              <a:t>https://r-spatial.org/book/17-Econometrics.html</a:t>
-            </a:r>
-            <a:endParaRPr lang="en-US" dirty="0"/>
-          </a:p>
-          <a:p>
-            <a:pPr lvl="1"/>
-            <a:endParaRPr lang="en-US" dirty="0"/>
-          </a:p>
-        </p:txBody>
-      </p:sp>
-      <p:sp>
-        <p:nvSpPr>
-          <p:cNvPr id="4" name="Slide Number Placeholder 3">
-            <a:extLst>
-              <a:ext uri="{FF2B5EF4-FFF2-40B4-BE49-F238E27FC236}">
-                <a16:creationId xmlns:a16="http://schemas.microsoft.com/office/drawing/2014/main" id="{D2808ED0-60BE-81B0-39D1-0C0EE44FDD5E}"/>
-              </a:ext>
-            </a:extLst>
-          </p:cNvPr>
-          <p:cNvSpPr>
-            <a:spLocks noGrp="1"/>
-          </p:cNvSpPr>
-          <p:nvPr>
-            <p:ph type="sldNum" sz="quarter" idx="12"/>
-          </p:nvPr>
-        </p:nvSpPr>
-        <p:spPr/>
-        <p:txBody>
-          <a:bodyPr/>
-          <a:lstStyle/>
-          <a:p>
-            <a:fld id="{C0343C75-1924-D247-85A3-0CB62E67E5D1}" type="slidenum">
-              <a:rPr lang="en-US" smtClean="0"/>
-              <a:t>29</a:t>
-            </a:fld>
-            <a:endParaRPr lang="en-US"/>
-          </a:p>
-        </p:txBody>
-      </p:sp>
-    </p:spTree>
-    <p:extLst>
-      <p:ext uri="{BB962C8B-B14F-4D97-AF65-F5344CB8AC3E}">
-        <p14:creationId xmlns:p14="http://schemas.microsoft.com/office/powerpoint/2010/main" val="2393416786"/>
       </p:ext>
     </p:extLst>
   </p:cSld>
@@ -17507,6 +18495,166 @@
     <p:extLst>
       <p:ext uri="{BB962C8B-B14F-4D97-AF65-F5344CB8AC3E}">
         <p14:creationId xmlns:p14="http://schemas.microsoft.com/office/powerpoint/2010/main" val="4057830378"/>
+      </p:ext>
+    </p:extLst>
+  </p:cSld>
+  <p:clrMapOvr>
+    <a:masterClrMapping/>
+  </p:clrMapOvr>
+</p:sld>
+</file>
+
+<file path=ppt/slides/slide30.xml><?xml version="1.0" encoding="utf-8"?>
+<p:sld xmlns:a="http://schemas.openxmlformats.org/drawingml/2006/main" xmlns:r="http://schemas.openxmlformats.org/officeDocument/2006/relationships" xmlns:p="http://schemas.openxmlformats.org/presentationml/2006/main">
+  <p:cSld>
+    <p:bg>
+      <p:bgPr>
+        <a:solidFill>
+          <a:schemeClr val="bg2"/>
+        </a:solidFill>
+        <a:effectLst/>
+      </p:bgPr>
+    </p:bg>
+    <p:spTree>
+      <p:nvGrpSpPr>
+        <p:cNvPr id="1" name=""/>
+        <p:cNvGrpSpPr/>
+        <p:nvPr/>
+      </p:nvGrpSpPr>
+      <p:grpSpPr>
+        <a:xfrm>
+          <a:off x="0" y="0"/>
+          <a:ext cx="0" cy="0"/>
+          <a:chOff x="0" y="0"/>
+          <a:chExt cx="0" cy="0"/>
+        </a:xfrm>
+      </p:grpSpPr>
+      <p:sp>
+        <p:nvSpPr>
+          <p:cNvPr id="2" name="Title 1">
+            <a:extLst>
+              <a:ext uri="{FF2B5EF4-FFF2-40B4-BE49-F238E27FC236}">
+                <a16:creationId xmlns:a16="http://schemas.microsoft.com/office/drawing/2014/main" id="{EE1778A9-DF75-760E-5946-D5CB9BB0CCCA}"/>
+              </a:ext>
+            </a:extLst>
+          </p:cNvPr>
+          <p:cNvSpPr>
+            <a:spLocks noGrp="1"/>
+          </p:cNvSpPr>
+          <p:nvPr>
+            <p:ph type="title"/>
+          </p:nvPr>
+        </p:nvSpPr>
+        <p:spPr/>
+        <p:txBody>
+          <a:bodyPr/>
+          <a:lstStyle/>
+          <a:p>
+            <a:r>
+              <a:rPr lang="en-US" dirty="0"/>
+              <a:t>Next</a:t>
+            </a:r>
+            <a:br>
+              <a:rPr lang="en-US" dirty="0"/>
+            </a:br>
+            <a:r>
+              <a:rPr lang="en-US" b="1" dirty="0"/>
+              <a:t>Spatial Modeling</a:t>
+            </a:r>
+          </a:p>
+        </p:txBody>
+      </p:sp>
+      <p:sp>
+        <p:nvSpPr>
+          <p:cNvPr id="3" name="Content Placeholder 2">
+            <a:extLst>
+              <a:ext uri="{FF2B5EF4-FFF2-40B4-BE49-F238E27FC236}">
+                <a16:creationId xmlns:a16="http://schemas.microsoft.com/office/drawing/2014/main" id="{9D8C69DB-0DB5-ECA1-24D0-4233342F2729}"/>
+              </a:ext>
+            </a:extLst>
+          </p:cNvPr>
+          <p:cNvSpPr>
+            <a:spLocks noGrp="1"/>
+          </p:cNvSpPr>
+          <p:nvPr>
+            <p:ph idx="1"/>
+          </p:nvPr>
+        </p:nvSpPr>
+        <p:spPr/>
+        <p:txBody>
+          <a:bodyPr/>
+          <a:lstStyle/>
+          <a:p>
+            <a:r>
+              <a:rPr lang="en-US" dirty="0"/>
+              <a:t>Spatial Regression</a:t>
+            </a:r>
+            <a:br>
+              <a:rPr lang="en-US" dirty="0"/>
+            </a:br>
+            <a:r>
+              <a:rPr lang="en-US" dirty="0">
+                <a:hlinkClick r:id="rId2"/>
+              </a:rPr>
+              <a:t>https://r-spatial.org/book/16-SpatialRegression.html</a:t>
+            </a:r>
+            <a:endParaRPr lang="en-US" dirty="0"/>
+          </a:p>
+          <a:p>
+            <a:r>
+              <a:rPr lang="en-US" dirty="0"/>
+              <a:t>Spatial Econometrics Models</a:t>
+            </a:r>
+            <a:br>
+              <a:rPr lang="en-US" dirty="0"/>
+            </a:br>
+            <a:r>
+              <a:rPr lang="en-US" dirty="0">
+                <a:hlinkClick r:id="rId3"/>
+              </a:rPr>
+              <a:t>https://r-spatial.org/book/17-Econometrics.html</a:t>
+            </a:r>
+            <a:endParaRPr lang="en-US" dirty="0"/>
+          </a:p>
+          <a:p>
+            <a:pPr lvl="1"/>
+            <a:endParaRPr lang="en-US" dirty="0"/>
+          </a:p>
+        </p:txBody>
+      </p:sp>
+      <p:sp>
+        <p:nvSpPr>
+          <p:cNvPr id="4" name="Slide Number Placeholder 3">
+            <a:extLst>
+              <a:ext uri="{FF2B5EF4-FFF2-40B4-BE49-F238E27FC236}">
+                <a16:creationId xmlns:a16="http://schemas.microsoft.com/office/drawing/2014/main" id="{D2808ED0-60BE-81B0-39D1-0C0EE44FDD5E}"/>
+              </a:ext>
+            </a:extLst>
+          </p:cNvPr>
+          <p:cNvSpPr>
+            <a:spLocks noGrp="1"/>
+          </p:cNvSpPr>
+          <p:nvPr>
+            <p:ph type="sldNum" sz="quarter" idx="12"/>
+          </p:nvPr>
+        </p:nvSpPr>
+        <p:spPr/>
+        <p:txBody>
+          <a:bodyPr/>
+          <a:lstStyle/>
+          <a:p>
+            <a:fld id="{C0343C75-1924-D247-85A3-0CB62E67E5D1}" type="slidenum">
+              <a:rPr lang="en-US" smtClean="0"/>
+              <a:t>30</a:t>
+            </a:fld>
+            <a:endParaRPr lang="en-US"/>
+          </a:p>
+        </p:txBody>
+      </p:sp>
+    </p:spTree>
+    <p:extLst>
+      <p:ext uri="{BB962C8B-B14F-4D97-AF65-F5344CB8AC3E}">
+        <p14:creationId xmlns:p14="http://schemas.microsoft.com/office/powerpoint/2010/main" val="2393416786"/>
       </p:ext>
     </p:extLst>
   </p:cSld>

--- a/DAEN489S26/week12_slides.pptx
+++ b/DAEN489S26/week12_slides.pptx
@@ -15495,8 +15495,8 @@
           </a:prstGeom>
         </p:spPr>
       </p:pic>
-      <mc:AlternateContent xmlns:mc="http://schemas.openxmlformats.org/markup-compatibility/2006">
-        <mc:Choice xmlns:a14="http://schemas.microsoft.com/office/drawing/2010/main" Requires="a14">
+      <mc:AlternateContent xmlns:mc="http://schemas.openxmlformats.org/markup-compatibility/2006" xmlns:a14="http://schemas.microsoft.com/office/drawing/2010/main">
+        <mc:Choice Requires="a14">
           <p:sp>
             <p:nvSpPr>
               <p:cNvPr id="3" name="Content Placeholder 2">
@@ -16049,7 +16049,7 @@
             </p:txBody>
           </p:sp>
         </mc:Choice>
-        <mc:Fallback>
+        <mc:Fallback xmlns="">
           <p:sp>
             <p:nvSpPr>
               <p:cNvPr id="3" name="Content Placeholder 2">
@@ -19890,8 +19890,16 @@
               <a:buAutoNum type="arabicPeriod"/>
             </a:pPr>
             <a:r>
+              <a:rPr lang="en-US" sz="1800" dirty="0">
+                <a:highlight>
+                  <a:srgbClr val="FFFF00"/>
+                </a:highlight>
+              </a:rPr>
+              <a:t>Drop</a:t>
+            </a:r>
+            <a:r>
               <a:rPr lang="en-US" sz="1800" dirty="0"/>
-              <a:t>Drop the entire row with the strange values.</a:t>
+              <a:t> the entire row with the strange values.</a:t>
             </a:r>
           </a:p>
           <a:p>
@@ -19900,8 +19908,16 @@
               <a:buAutoNum type="arabicPeriod"/>
             </a:pPr>
             <a:r>
+              <a:rPr lang="en-US" sz="1800" dirty="0">
+                <a:highlight>
+                  <a:srgbClr val="FFFF00"/>
+                </a:highlight>
+              </a:rPr>
+              <a:t>Replacing</a:t>
+            </a:r>
+            <a:r>
               <a:rPr lang="en-US" sz="1800" dirty="0"/>
-              <a:t>Replacing the unusual values with missing values.</a:t>
+              <a:t> the unusual values with missing values.</a:t>
             </a:r>
           </a:p>
         </p:txBody>
@@ -20141,7 +20157,24 @@
                 <a:latin typeface="Consolas" panose="020B0609020204030204" pitchFamily="49" charset="0"/>
                 <a:cs typeface="Consolas" panose="020B0609020204030204" pitchFamily="49" charset="0"/>
               </a:rPr>
-              <a:t># I don't recommend this option</a:t>
+              <a:t># I </a:t>
+            </a:r>
+            <a:r>
+              <a:rPr lang="en-US" sz="1200" dirty="0">
+                <a:highlight>
+                  <a:srgbClr val="FFFF00"/>
+                </a:highlight>
+                <a:latin typeface="Consolas" panose="020B0609020204030204" pitchFamily="49" charset="0"/>
+                <a:cs typeface="Consolas" panose="020B0609020204030204" pitchFamily="49" charset="0"/>
+              </a:rPr>
+              <a:t>don't</a:t>
+            </a:r>
+            <a:r>
+              <a:rPr lang="en-US" sz="1200" dirty="0">
+                <a:latin typeface="Consolas" panose="020B0609020204030204" pitchFamily="49" charset="0"/>
+                <a:cs typeface="Consolas" panose="020B0609020204030204" pitchFamily="49" charset="0"/>
+              </a:rPr>
+              <a:t> recommend this option</a:t>
             </a:r>
           </a:p>
           <a:p>
@@ -21065,16 +21098,31 @@
               <a:rPr lang="en-US" sz="1800" dirty="0"/>
             </a:br>
             <a:r>
+              <a:rPr lang="en-US" sz="1400" dirty="0"/>
+              <a:t>(such as </a:t>
+            </a:r>
+            <a:r>
+              <a:rPr lang="en-US" sz="1400" u="sng" dirty="0"/>
+              <a:t>values that differ markedly from their </a:t>
+            </a:r>
+            <a:r>
+              <a:rPr lang="en-US" sz="1400" b="1" u="sng" dirty="0">
+                <a:solidFill>
+                  <a:srgbClr val="C00000"/>
+                </a:solidFill>
+                <a:highlight>
+                  <a:srgbClr val="FFFF00"/>
+                </a:highlight>
+              </a:rPr>
+              <a:t>neighbors</a:t>
+            </a:r>
+            <a:r>
+              <a:rPr lang="en-US" sz="1400" dirty="0"/>
+              <a:t>)</a:t>
+            </a:r>
+            <a:r>
               <a:rPr lang="en-US" sz="1800" dirty="0"/>
-              <a:t>(such as </a:t>
-            </a:r>
-            <a:r>
-              <a:rPr lang="en-US" sz="1800" u="sng" dirty="0"/>
-              <a:t>values that differ markedly from their neighbors</a:t>
-            </a:r>
-            <a:r>
-              <a:rPr lang="en-US" sz="1800" dirty="0"/>
-              <a:t>),</a:t>
+              <a:t>,</a:t>
             </a:r>
             <a:br>
               <a:rPr lang="en-US" sz="1800" dirty="0"/>
@@ -21091,6 +21139,30 @@
               <a:rPr lang="en-US" sz="1800" dirty="0"/>
               <a:t> in their geographic context.</a:t>
             </a:r>
+          </a:p>
+          <a:p>
+            <a:pPr lvl="1"/>
+            <a:endParaRPr lang="en-US" sz="1800" dirty="0"/>
+          </a:p>
+          <a:p>
+            <a:pPr lvl="1"/>
+            <a:endParaRPr lang="en-US" sz="1800" dirty="0"/>
+          </a:p>
+          <a:p>
+            <a:pPr lvl="1"/>
+            <a:endParaRPr lang="en-US" sz="1800" dirty="0"/>
+          </a:p>
+          <a:p>
+            <a:pPr lvl="1"/>
+            <a:endParaRPr lang="en-US" sz="1800" dirty="0"/>
+          </a:p>
+          <a:p>
+            <a:pPr lvl="1"/>
+            <a:endParaRPr lang="en-US" sz="1800" dirty="0"/>
+          </a:p>
+          <a:p>
+            <a:pPr lvl="1"/>
+            <a:endParaRPr lang="en-US" sz="1800" dirty="0"/>
           </a:p>
           <a:p>
             <a:pPr lvl="1"/>
@@ -21150,6 +21222,82 @@
               <a:t>6</a:t>
             </a:fld>
             <a:endParaRPr lang="en-US"/>
+          </a:p>
+        </p:txBody>
+      </p:sp>
+      <p:pic>
+        <p:nvPicPr>
+          <p:cNvPr id="8" name="Picture 7">
+            <a:extLst>
+              <a:ext uri="{FF2B5EF4-FFF2-40B4-BE49-F238E27FC236}">
+                <a16:creationId xmlns:a16="http://schemas.microsoft.com/office/drawing/2014/main" id="{FBB84A14-60A0-2EF9-A3F5-CB817A7B6610}"/>
+              </a:ext>
+            </a:extLst>
+          </p:cNvPr>
+          <p:cNvPicPr>
+            <a:picLocks noChangeAspect="1"/>
+          </p:cNvPicPr>
+          <p:nvPr/>
+        </p:nvPicPr>
+        <p:blipFill>
+          <a:blip r:embed="rId2"/>
+          <a:srcRect l="7417" t="14976" r="7207"/>
+          <a:stretch>
+            <a:fillRect/>
+          </a:stretch>
+        </p:blipFill>
+        <p:spPr>
+          <a:xfrm>
+            <a:off x="3830320" y="3658549"/>
+            <a:ext cx="1483360" cy="1681600"/>
+          </a:xfrm>
+          <a:prstGeom prst="rect">
+            <a:avLst/>
+          </a:prstGeom>
+        </p:spPr>
+      </p:pic>
+      <p:sp>
+        <p:nvSpPr>
+          <p:cNvPr id="9" name="TextBox 8">
+            <a:extLst>
+              <a:ext uri="{FF2B5EF4-FFF2-40B4-BE49-F238E27FC236}">
+                <a16:creationId xmlns:a16="http://schemas.microsoft.com/office/drawing/2014/main" id="{F924AB61-33F6-653D-8958-8BCD396E0834}"/>
+              </a:ext>
+            </a:extLst>
+          </p:cNvPr>
+          <p:cNvSpPr txBox="1"/>
+          <p:nvPr/>
+        </p:nvSpPr>
+        <p:spPr>
+          <a:xfrm>
+            <a:off x="5313680" y="4345460"/>
+            <a:ext cx="2500364" cy="307777"/>
+          </a:xfrm>
+          <a:prstGeom prst="rect">
+            <a:avLst/>
+          </a:prstGeom>
+          <a:solidFill>
+            <a:schemeClr val="accent4">
+              <a:lumMod val="20000"/>
+              <a:lumOff val="80000"/>
+            </a:schemeClr>
+          </a:solidFill>
+        </p:spPr>
+        <p:txBody>
+          <a:bodyPr wrap="none" rtlCol="0" anchor="ctr">
+            <a:spAutoFit/>
+          </a:bodyPr>
+          <a:lstStyle/>
+          <a:p>
+            <a:pPr algn="ctr"/>
+            <a:r>
+              <a:rPr lang="en-US" sz="1400" b="1" i="1" dirty="0">
+                <a:solidFill>
+                  <a:srgbClr val="C00000"/>
+                </a:solidFill>
+              </a:rPr>
+              <a:t>Don't be like this neighbor ...</a:t>
+            </a:r>
           </a:p>
         </p:txBody>
       </p:sp>
